--- a/data/Presentation Document ppt.pptx
+++ b/data/Presentation Document ppt.pptx
@@ -693,6 +693,324 @@
 </p:notes>
 </file>
 
+<file path=ppt/notesSlides/notesSlide10.xml><?xml version="1.0" encoding="utf-8"?>
+<p:notes xmlns:a="http://schemas.openxmlformats.org/drawingml/2006/main" xmlns:r="http://schemas.openxmlformats.org/officeDocument/2006/relationships" xmlns:p="http://schemas.openxmlformats.org/presentationml/2006/main">
+  <p:cSld>
+    <p:spTree>
+      <p:nvGrpSpPr>
+        <p:cNvPr id="1" name=""/>
+        <p:cNvGrpSpPr/>
+        <p:nvPr/>
+      </p:nvGrpSpPr>
+      <p:grpSpPr>
+        <a:xfrm>
+          <a:off x="0" y="0"/>
+          <a:ext cx="0" cy="0"/>
+          <a:chOff x="0" y="0"/>
+          <a:chExt cx="0" cy="0"/>
+        </a:xfrm>
+      </p:grpSpPr>
+      <p:sp>
+        <p:nvSpPr>
+          <p:cNvPr id="2" name="Slide Image Placeholder 1"/>
+          <p:cNvSpPr>
+            <a:spLocks noGrp="1" noRot="1" noChangeAspect="1"/>
+          </p:cNvSpPr>
+          <p:nvPr>
+            <p:ph type="sldImg"/>
+          </p:nvPr>
+        </p:nvSpPr>
+        <p:spPr>
+          <a:xfrm>
+            <a:off x="138113" y="766763"/>
+            <a:ext cx="6823075" cy="3838575"/>
+          </a:xfrm>
+        </p:spPr>
+      </p:sp>
+      <p:sp>
+        <p:nvSpPr>
+          <p:cNvPr id="3" name="Notes Placeholder 2"/>
+          <p:cNvSpPr>
+            <a:spLocks noGrp="1"/>
+          </p:cNvSpPr>
+          <p:nvPr>
+            <p:ph type="body" idx="1"/>
+          </p:nvPr>
+        </p:nvSpPr>
+        <p:spPr/>
+        <p:txBody>
+          <a:bodyPr/>
+          <a:lstStyle/>
+          <a:p>
+            <a:r>
+              <a:rPr lang="en-GB" dirty="0"/>
+              <a:t>SHAP explains how much each feature pushes a prediction up or down.</a:t>
+            </a:r>
+          </a:p>
+          <a:p>
+            <a:r>
+              <a:rPr lang="en-GB" dirty="0"/>
+              <a:t>The SHAP analysis provides a detailed explanation of how each feature influences predictions. The summary plot shows that higher values of dominant crime type and previous crime significantly increase predicted crime levels. The global importance plot confirms that these features have the largest overall impact, while location features contribute less. This demonstrates that both temporal and crime-type factors are the main drivers of the model’s predictions.</a:t>
+            </a:r>
+            <a:endParaRPr lang="en-PK" dirty="0"/>
+          </a:p>
+        </p:txBody>
+      </p:sp>
+      <p:sp>
+        <p:nvSpPr>
+          <p:cNvPr id="4" name="Slide Number Placeholder 3"/>
+          <p:cNvSpPr>
+            <a:spLocks noGrp="1"/>
+          </p:cNvSpPr>
+          <p:nvPr>
+            <p:ph type="sldNum" sz="quarter" idx="5"/>
+          </p:nvPr>
+        </p:nvSpPr>
+        <p:spPr/>
+        <p:txBody>
+          <a:bodyPr/>
+          <a:lstStyle/>
+          <a:p>
+            <a:fld id="{A9A0EA98-5831-4853-B862-C702E6EB345C}" type="slidenum">
+              <a:rPr lang="en-US" smtClean="0"/>
+              <a:t>24</a:t>
+            </a:fld>
+            <a:endParaRPr lang="en-US"/>
+          </a:p>
+        </p:txBody>
+      </p:sp>
+    </p:spTree>
+    <p:extLst>
+      <p:ext uri="{BB962C8B-B14F-4D97-AF65-F5344CB8AC3E}">
+        <p14:creationId xmlns:p14="http://schemas.microsoft.com/office/powerpoint/2010/main" val="1360943121"/>
+      </p:ext>
+    </p:extLst>
+  </p:cSld>
+  <p:clrMapOvr>
+    <a:masterClrMapping/>
+  </p:clrMapOvr>
+</p:notes>
+</file>
+
+<file path=ppt/notesSlides/notesSlide11.xml><?xml version="1.0" encoding="utf-8"?>
+<p:notes xmlns:a="http://schemas.openxmlformats.org/drawingml/2006/main" xmlns:r="http://schemas.openxmlformats.org/officeDocument/2006/relationships" xmlns:p="http://schemas.openxmlformats.org/presentationml/2006/main">
+  <p:cSld>
+    <p:spTree>
+      <p:nvGrpSpPr>
+        <p:cNvPr id="1" name=""/>
+        <p:cNvGrpSpPr/>
+        <p:nvPr/>
+      </p:nvGrpSpPr>
+      <p:grpSpPr>
+        <a:xfrm>
+          <a:off x="0" y="0"/>
+          <a:ext cx="0" cy="0"/>
+          <a:chOff x="0" y="0"/>
+          <a:chExt cx="0" cy="0"/>
+        </a:xfrm>
+      </p:grpSpPr>
+      <p:sp>
+        <p:nvSpPr>
+          <p:cNvPr id="2" name="Slide Image Placeholder 1"/>
+          <p:cNvSpPr>
+            <a:spLocks noGrp="1" noRot="1" noChangeAspect="1"/>
+          </p:cNvSpPr>
+          <p:nvPr>
+            <p:ph type="sldImg"/>
+          </p:nvPr>
+        </p:nvSpPr>
+        <p:spPr>
+          <a:xfrm>
+            <a:off x="138113" y="766763"/>
+            <a:ext cx="6823075" cy="3838575"/>
+          </a:xfrm>
+        </p:spPr>
+      </p:sp>
+      <p:sp>
+        <p:nvSpPr>
+          <p:cNvPr id="3" name="Notes Placeholder 2"/>
+          <p:cNvSpPr>
+            <a:spLocks noGrp="1"/>
+          </p:cNvSpPr>
+          <p:nvPr>
+            <p:ph type="body" idx="1"/>
+          </p:nvPr>
+        </p:nvSpPr>
+        <p:spPr/>
+        <p:txBody>
+          <a:bodyPr/>
+          <a:lstStyle/>
+          <a:p>
+            <a:r>
+              <a:rPr lang="en-GB" b="1" dirty="0"/>
+              <a:t>Symmetrical shape</a:t>
+            </a:r>
+          </a:p>
+          <a:p>
+            <a:r>
+              <a:rPr lang="en-GB" dirty="0"/>
+              <a:t>The graph looks roughly balanced:</a:t>
+            </a:r>
+          </a:p>
+          <a:p>
+            <a:pPr>
+              <a:buFont typeface="Arial" panose="020B0604020202020204" pitchFamily="34" charset="0"/>
+              <a:buChar char="•"/>
+            </a:pPr>
+            <a:r>
+              <a:rPr lang="en-GB" dirty="0"/>
+              <a:t>Errors on left (negative) </a:t>
+            </a:r>
+          </a:p>
+          <a:p>
+            <a:pPr>
+              <a:buFont typeface="Arial" panose="020B0604020202020204" pitchFamily="34" charset="0"/>
+              <a:buChar char="•"/>
+            </a:pPr>
+            <a:r>
+              <a:rPr lang="en-GB" dirty="0"/>
+              <a:t>Errors on right (positive) </a:t>
+            </a:r>
+          </a:p>
+          <a:p>
+            <a:r>
+              <a:rPr lang="en-GB" b="1" dirty="0"/>
+              <a:t>Meaning:</a:t>
+            </a:r>
+          </a:p>
+          <a:p>
+            <a:r>
+              <a:rPr lang="en-GB" dirty="0"/>
+              <a:t>Model is not biased (not always over or under predicting)</a:t>
+            </a:r>
+          </a:p>
+          <a:p>
+            <a:endParaRPr lang="en-GB" dirty="0"/>
+          </a:p>
+          <a:p>
+            <a:endParaRPr lang="en-GB" dirty="0"/>
+          </a:p>
+          <a:p>
+            <a:r>
+              <a:rPr lang="en-GB" b="1" dirty="0"/>
+              <a:t>Good model behaviour</a:t>
+            </a:r>
+          </a:p>
+          <a:p>
+            <a:r>
+              <a:rPr lang="en-GB" dirty="0"/>
+              <a:t>Ideal residual distribution should be:</a:t>
+            </a:r>
+          </a:p>
+          <a:p>
+            <a:pPr>
+              <a:buFont typeface="Arial" panose="020B0604020202020204" pitchFamily="34" charset="0"/>
+              <a:buChar char="•"/>
+            </a:pPr>
+            <a:r>
+              <a:rPr lang="en-GB" dirty="0" err="1"/>
+              <a:t>Centered</a:t>
+            </a:r>
+            <a:r>
+              <a:rPr lang="en-GB" dirty="0"/>
+              <a:t> at zero </a:t>
+            </a:r>
+            <a:r>
+              <a:rPr lang="en-PK" dirty="0"/>
+              <a:t>✅ </a:t>
+            </a:r>
+          </a:p>
+          <a:p>
+            <a:pPr>
+              <a:buFont typeface="Arial" panose="020B0604020202020204" pitchFamily="34" charset="0"/>
+              <a:buChar char="•"/>
+            </a:pPr>
+            <a:r>
+              <a:rPr lang="en-GB" dirty="0"/>
+              <a:t>Symmetrical </a:t>
+            </a:r>
+            <a:r>
+              <a:rPr lang="en-PK" dirty="0"/>
+              <a:t>✅ </a:t>
+            </a:r>
+          </a:p>
+          <a:p>
+            <a:pPr>
+              <a:buFont typeface="Arial" panose="020B0604020202020204" pitchFamily="34" charset="0"/>
+              <a:buChar char="•"/>
+            </a:pPr>
+            <a:r>
+              <a:rPr lang="en-GB" dirty="0"/>
+              <a:t>Narrow spread </a:t>
+            </a:r>
+            <a:r>
+              <a:rPr lang="en-PK" dirty="0"/>
+              <a:t>✅</a:t>
+            </a:r>
+          </a:p>
+          <a:p>
+            <a:endParaRPr lang="en-GB" dirty="0"/>
+          </a:p>
+          <a:p>
+            <a:endParaRPr lang="en-GB" dirty="0"/>
+          </a:p>
+          <a:p>
+            <a:r>
+              <a:rPr lang="en-GB" dirty="0"/>
+              <a:t>Residual = 0 → perfect prediction </a:t>
+            </a:r>
+          </a:p>
+          <a:p>
+            <a:r>
+              <a:rPr lang="en-GB" dirty="0"/>
+              <a:t>Positive residual → model underpredicted </a:t>
+            </a:r>
+          </a:p>
+          <a:p>
+            <a:r>
+              <a:rPr lang="en-GB" dirty="0"/>
+              <a:t>Negative residual → model overpredicted</a:t>
+            </a:r>
+            <a:endParaRPr lang="en-PK" dirty="0"/>
+          </a:p>
+        </p:txBody>
+      </p:sp>
+      <p:sp>
+        <p:nvSpPr>
+          <p:cNvPr id="4" name="Slide Number Placeholder 3"/>
+          <p:cNvSpPr>
+            <a:spLocks noGrp="1"/>
+          </p:cNvSpPr>
+          <p:nvPr>
+            <p:ph type="sldNum" sz="quarter" idx="5"/>
+          </p:nvPr>
+        </p:nvSpPr>
+        <p:spPr/>
+        <p:txBody>
+          <a:bodyPr/>
+          <a:lstStyle/>
+          <a:p>
+            <a:fld id="{A9A0EA98-5831-4853-B862-C702E6EB345C}" type="slidenum">
+              <a:rPr lang="en-US" smtClean="0"/>
+              <a:t>25</a:t>
+            </a:fld>
+            <a:endParaRPr lang="en-US"/>
+          </a:p>
+        </p:txBody>
+      </p:sp>
+    </p:spTree>
+    <p:extLst>
+      <p:ext uri="{BB962C8B-B14F-4D97-AF65-F5344CB8AC3E}">
+        <p14:creationId xmlns:p14="http://schemas.microsoft.com/office/powerpoint/2010/main" val="2297642692"/>
+      </p:ext>
+    </p:extLst>
+  </p:cSld>
+  <p:clrMapOvr>
+    <a:masterClrMapping/>
+  </p:clrMapOvr>
+</p:notes>
+</file>
+
 <file path=ppt/notesSlides/notesSlide2.xml><?xml version="1.0" encoding="utf-8"?>
 <p:notes xmlns:a="http://schemas.openxmlformats.org/drawingml/2006/main" xmlns:r="http://schemas.openxmlformats.org/officeDocument/2006/relationships" xmlns:p="http://schemas.openxmlformats.org/presentationml/2006/main">
   <p:cSld>
@@ -1174,6 +1492,19 @@
               <a:t>Silhouette Score: Goodness of clustering.</a:t>
             </a:r>
           </a:p>
+          <a:p>
+            <a:r>
+              <a:rPr lang="en-GB" b="0" i="0" dirty="0">
+                <a:solidFill>
+                  <a:srgbClr val="EEF0FF"/>
+                </a:solidFill>
+                <a:effectLst/>
+                <a:latin typeface="Google Sans"/>
+              </a:rPr>
+              <a:t>how similar a data point is to its own cluster</a:t>
+            </a:r>
+            <a:endParaRPr lang="en-PK" dirty="0"/>
+          </a:p>
         </p:txBody>
       </p:sp>
       <p:sp>
@@ -1262,6 +1593,39 @@
           <a:lstStyle/>
           <a:p>
             <a:r>
+              <a:rPr lang="en-GB" dirty="0"/>
+              <a:t>For RQ2, two regression models were used: Linear Regression and Random Forest. The goal is to predict crime count for the next month based on </a:t>
+            </a:r>
+            <a:r>
+              <a:rPr lang="en-GB" b="1" dirty="0"/>
+              <a:t>historical and spatial features</a:t>
+            </a:r>
+            <a:r>
+              <a:rPr lang="en-GB" dirty="0"/>
+              <a:t>. Linear Regression provides a simple baseline by </a:t>
+            </a:r>
+            <a:r>
+              <a:rPr lang="en-GB" dirty="0" err="1"/>
+              <a:t>modeling</a:t>
+            </a:r>
+            <a:r>
+              <a:rPr lang="en-GB" dirty="0"/>
+              <a:t> linear relationships, while Random Forest captures more complex patterns and interactions in the data. This comparison helps evaluate whether crime patterns are simple or require more advanced </a:t>
+            </a:r>
+            <a:r>
+              <a:rPr lang="en-GB" dirty="0" err="1"/>
+              <a:t>modeling</a:t>
+            </a:r>
+            <a:r>
+              <a:rPr lang="en-GB" dirty="0"/>
+              <a:t> techniques.</a:t>
+            </a:r>
+          </a:p>
+          <a:p>
+            <a:endParaRPr lang="en-GB" b="1" dirty="0"/>
+          </a:p>
+          <a:p>
+            <a:r>
               <a:rPr lang="en-GB" b="1" dirty="0"/>
               <a:t>Strengths</a:t>
             </a:r>
@@ -1353,7 +1717,7 @@
             </a:r>
           </a:p>
           <a:p>
-            <a:endParaRPr lang="en-PK"/>
+            <a:endParaRPr lang="en-PK" dirty="0"/>
           </a:p>
           <a:p>
             <a:endParaRPr lang="en-GB" b="1" dirty="0"/>
@@ -1492,6 +1856,48 @@
           <a:bodyPr/>
           <a:lstStyle/>
           <a:p>
+            <a:r>
+              <a:rPr lang="en-GB" b="1" dirty="0"/>
+              <a:t>How to understand RMSE</a:t>
+            </a:r>
+          </a:p>
+          <a:p>
+            <a:pPr>
+              <a:buFont typeface="Arial" panose="020B0604020202020204" pitchFamily="34" charset="0"/>
+              <a:buChar char="•"/>
+            </a:pPr>
+            <a:r>
+              <a:rPr lang="en-GB" dirty="0"/>
+              <a:t>Lower RMSE = </a:t>
+            </a:r>
+            <a:r>
+              <a:rPr lang="en-GB" b="1" dirty="0"/>
+              <a:t>better model</a:t>
+            </a:r>
+            <a:r>
+              <a:rPr lang="en-GB" dirty="0"/>
+              <a:t> </a:t>
+            </a:r>
+          </a:p>
+          <a:p>
+            <a:pPr>
+              <a:buFont typeface="Arial" panose="020B0604020202020204" pitchFamily="34" charset="0"/>
+              <a:buChar char="•"/>
+            </a:pPr>
+            <a:r>
+              <a:rPr lang="en-GB" dirty="0"/>
+              <a:t>Higher RMSE = </a:t>
+            </a:r>
+            <a:r>
+              <a:rPr lang="en-GB" b="1" dirty="0"/>
+              <a:t>worse model</a:t>
+            </a:r>
+            <a:r>
+              <a:rPr lang="en-GB" dirty="0"/>
+              <a:t> </a:t>
+            </a:r>
+          </a:p>
+          <a:p>
             <a:endParaRPr lang="en-PK" dirty="0"/>
           </a:p>
         </p:txBody>
@@ -1523,6 +1929,534 @@
     <p:extLst>
       <p:ext uri="{BB962C8B-B14F-4D97-AF65-F5344CB8AC3E}">
         <p14:creationId xmlns:p14="http://schemas.microsoft.com/office/powerpoint/2010/main" val="1110769567"/>
+      </p:ext>
+    </p:extLst>
+  </p:cSld>
+  <p:clrMapOvr>
+    <a:masterClrMapping/>
+  </p:clrMapOvr>
+</p:notes>
+</file>
+
+<file path=ppt/notesSlides/notesSlide6.xml><?xml version="1.0" encoding="utf-8"?>
+<p:notes xmlns:a="http://schemas.openxmlformats.org/drawingml/2006/main" xmlns:r="http://schemas.openxmlformats.org/officeDocument/2006/relationships" xmlns:p="http://schemas.openxmlformats.org/presentationml/2006/main">
+  <p:cSld>
+    <p:spTree>
+      <p:nvGrpSpPr>
+        <p:cNvPr id="1" name=""/>
+        <p:cNvGrpSpPr/>
+        <p:nvPr/>
+      </p:nvGrpSpPr>
+      <p:grpSpPr>
+        <a:xfrm>
+          <a:off x="0" y="0"/>
+          <a:ext cx="0" cy="0"/>
+          <a:chOff x="0" y="0"/>
+          <a:chExt cx="0" cy="0"/>
+        </a:xfrm>
+      </p:grpSpPr>
+      <p:sp>
+        <p:nvSpPr>
+          <p:cNvPr id="2" name="Slide Image Placeholder 1"/>
+          <p:cNvSpPr>
+            <a:spLocks noGrp="1" noRot="1" noChangeAspect="1"/>
+          </p:cNvSpPr>
+          <p:nvPr>
+            <p:ph type="sldImg"/>
+          </p:nvPr>
+        </p:nvSpPr>
+        <p:spPr>
+          <a:xfrm>
+            <a:off x="138113" y="766763"/>
+            <a:ext cx="6823075" cy="3838575"/>
+          </a:xfrm>
+        </p:spPr>
+      </p:sp>
+      <p:sp>
+        <p:nvSpPr>
+          <p:cNvPr id="3" name="Notes Placeholder 2"/>
+          <p:cNvSpPr>
+            <a:spLocks noGrp="1"/>
+          </p:cNvSpPr>
+          <p:nvPr>
+            <p:ph type="body" idx="1"/>
+          </p:nvPr>
+        </p:nvSpPr>
+        <p:spPr/>
+        <p:txBody>
+          <a:bodyPr/>
+          <a:lstStyle/>
+          <a:p>
+            <a:r>
+              <a:rPr lang="en-GB" dirty="0"/>
+              <a:t>This plot compares actual and predicted crime values for the Random Forest model. The red line represents perfect predictions. Most points lie close to this line, indicating strong model performance, especially for low and medium crime levels. However, at higher crime values, the points are more spread out and often fall below the line, showing that the model tends to underestimate extreme cases. This suggests that while the model performs well overall, predicting very high crime levels remains more challenging.</a:t>
+            </a:r>
+            <a:endParaRPr lang="en-PK" dirty="0"/>
+          </a:p>
+        </p:txBody>
+      </p:sp>
+      <p:sp>
+        <p:nvSpPr>
+          <p:cNvPr id="4" name="Slide Number Placeholder 3"/>
+          <p:cNvSpPr>
+            <a:spLocks noGrp="1"/>
+          </p:cNvSpPr>
+          <p:nvPr>
+            <p:ph type="sldNum" sz="quarter" idx="5"/>
+          </p:nvPr>
+        </p:nvSpPr>
+        <p:spPr/>
+        <p:txBody>
+          <a:bodyPr/>
+          <a:lstStyle/>
+          <a:p>
+            <a:fld id="{A9A0EA98-5831-4853-B862-C702E6EB345C}" type="slidenum">
+              <a:rPr lang="en-US" smtClean="0"/>
+              <a:t>20</a:t>
+            </a:fld>
+            <a:endParaRPr lang="en-US"/>
+          </a:p>
+        </p:txBody>
+      </p:sp>
+    </p:spTree>
+    <p:extLst>
+      <p:ext uri="{BB962C8B-B14F-4D97-AF65-F5344CB8AC3E}">
+        <p14:creationId xmlns:p14="http://schemas.microsoft.com/office/powerpoint/2010/main" val="641247418"/>
+      </p:ext>
+    </p:extLst>
+  </p:cSld>
+  <p:clrMapOvr>
+    <a:masterClrMapping/>
+  </p:clrMapOvr>
+</p:notes>
+</file>
+
+<file path=ppt/notesSlides/notesSlide7.xml><?xml version="1.0" encoding="utf-8"?>
+<p:notes xmlns:a="http://schemas.openxmlformats.org/drawingml/2006/main" xmlns:r="http://schemas.openxmlformats.org/officeDocument/2006/relationships" xmlns:p="http://schemas.openxmlformats.org/presentationml/2006/main">
+  <p:cSld>
+    <p:spTree>
+      <p:nvGrpSpPr>
+        <p:cNvPr id="1" name=""/>
+        <p:cNvGrpSpPr/>
+        <p:nvPr/>
+      </p:nvGrpSpPr>
+      <p:grpSpPr>
+        <a:xfrm>
+          <a:off x="0" y="0"/>
+          <a:ext cx="0" cy="0"/>
+          <a:chOff x="0" y="0"/>
+          <a:chExt cx="0" cy="0"/>
+        </a:xfrm>
+      </p:grpSpPr>
+      <p:sp>
+        <p:nvSpPr>
+          <p:cNvPr id="2" name="Slide Image Placeholder 1"/>
+          <p:cNvSpPr>
+            <a:spLocks noGrp="1" noRot="1" noChangeAspect="1"/>
+          </p:cNvSpPr>
+          <p:nvPr>
+            <p:ph type="sldImg"/>
+          </p:nvPr>
+        </p:nvSpPr>
+        <p:spPr>
+          <a:xfrm>
+            <a:off x="138113" y="766763"/>
+            <a:ext cx="6823075" cy="3838575"/>
+          </a:xfrm>
+        </p:spPr>
+      </p:sp>
+      <p:sp>
+        <p:nvSpPr>
+          <p:cNvPr id="3" name="Notes Placeholder 2"/>
+          <p:cNvSpPr>
+            <a:spLocks noGrp="1"/>
+          </p:cNvSpPr>
+          <p:nvPr>
+            <p:ph type="body" idx="1"/>
+          </p:nvPr>
+        </p:nvSpPr>
+        <p:spPr/>
+        <p:txBody>
+          <a:bodyPr/>
+          <a:lstStyle/>
+          <a:p>
+            <a:r>
+              <a:rPr lang="en-GB" dirty="0"/>
+              <a:t>Overfitting = model learns training data too well but fails on new data</a:t>
+            </a:r>
+            <a:endParaRPr lang="en-PK" dirty="0"/>
+          </a:p>
+        </p:txBody>
+      </p:sp>
+      <p:sp>
+        <p:nvSpPr>
+          <p:cNvPr id="4" name="Slide Number Placeholder 3"/>
+          <p:cNvSpPr>
+            <a:spLocks noGrp="1"/>
+          </p:cNvSpPr>
+          <p:nvPr>
+            <p:ph type="sldNum" sz="quarter" idx="5"/>
+          </p:nvPr>
+        </p:nvSpPr>
+        <p:spPr/>
+        <p:txBody>
+          <a:bodyPr/>
+          <a:lstStyle/>
+          <a:p>
+            <a:fld id="{A9A0EA98-5831-4853-B862-C702E6EB345C}" type="slidenum">
+              <a:rPr lang="en-US" smtClean="0"/>
+              <a:t>21</a:t>
+            </a:fld>
+            <a:endParaRPr lang="en-US"/>
+          </a:p>
+        </p:txBody>
+      </p:sp>
+    </p:spTree>
+    <p:extLst>
+      <p:ext uri="{BB962C8B-B14F-4D97-AF65-F5344CB8AC3E}">
+        <p14:creationId xmlns:p14="http://schemas.microsoft.com/office/powerpoint/2010/main" val="1883837575"/>
+      </p:ext>
+    </p:extLst>
+  </p:cSld>
+  <p:clrMapOvr>
+    <a:masterClrMapping/>
+  </p:clrMapOvr>
+</p:notes>
+</file>
+
+<file path=ppt/notesSlides/notesSlide8.xml><?xml version="1.0" encoding="utf-8"?>
+<p:notes xmlns:a="http://schemas.openxmlformats.org/drawingml/2006/main" xmlns:r="http://schemas.openxmlformats.org/officeDocument/2006/relationships" xmlns:p="http://schemas.openxmlformats.org/presentationml/2006/main">
+  <p:cSld>
+    <p:spTree>
+      <p:nvGrpSpPr>
+        <p:cNvPr id="1" name=""/>
+        <p:cNvGrpSpPr/>
+        <p:nvPr/>
+      </p:nvGrpSpPr>
+      <p:grpSpPr>
+        <a:xfrm>
+          <a:off x="0" y="0"/>
+          <a:ext cx="0" cy="0"/>
+          <a:chOff x="0" y="0"/>
+          <a:chExt cx="0" cy="0"/>
+        </a:xfrm>
+      </p:grpSpPr>
+      <p:sp>
+        <p:nvSpPr>
+          <p:cNvPr id="2" name="Slide Image Placeholder 1"/>
+          <p:cNvSpPr>
+            <a:spLocks noGrp="1" noRot="1" noChangeAspect="1"/>
+          </p:cNvSpPr>
+          <p:nvPr>
+            <p:ph type="sldImg"/>
+          </p:nvPr>
+        </p:nvSpPr>
+        <p:spPr>
+          <a:xfrm>
+            <a:off x="138113" y="766763"/>
+            <a:ext cx="6823075" cy="3838575"/>
+          </a:xfrm>
+        </p:spPr>
+      </p:sp>
+      <p:sp>
+        <p:nvSpPr>
+          <p:cNvPr id="3" name="Notes Placeholder 2"/>
+          <p:cNvSpPr>
+            <a:spLocks noGrp="1"/>
+          </p:cNvSpPr>
+          <p:nvPr>
+            <p:ph type="body" idx="1"/>
+          </p:nvPr>
+        </p:nvSpPr>
+        <p:spPr/>
+        <p:txBody>
+          <a:bodyPr/>
+          <a:lstStyle/>
+          <a:p>
+            <a:r>
+              <a:rPr lang="en-GB" dirty="0"/>
+              <a:t>Regularisation means:</a:t>
+            </a:r>
+          </a:p>
+          <a:p>
+            <a:pPr>
+              <a:buFont typeface="Arial" panose="020B0604020202020204" pitchFamily="34" charset="0"/>
+              <a:buChar char="•"/>
+            </a:pPr>
+            <a:r>
+              <a:rPr lang="en-GB" dirty="0"/>
+              <a:t>Limiting tree depth </a:t>
+            </a:r>
+          </a:p>
+          <a:p>
+            <a:pPr>
+              <a:buFont typeface="Arial" panose="020B0604020202020204" pitchFamily="34" charset="0"/>
+              <a:buChar char="•"/>
+            </a:pPr>
+            <a:r>
+              <a:rPr lang="en-GB" dirty="0"/>
+              <a:t>Reducing splits </a:t>
+            </a:r>
+          </a:p>
+          <a:p>
+            <a:pPr>
+              <a:buFont typeface="Arial" panose="020B0604020202020204" pitchFamily="34" charset="0"/>
+              <a:buChar char="•"/>
+            </a:pPr>
+            <a:r>
+              <a:rPr lang="en-GB" dirty="0"/>
+              <a:t>Making trees less complex</a:t>
+            </a:r>
+          </a:p>
+          <a:p>
+            <a:pPr>
+              <a:buFont typeface="Arial" panose="020B0604020202020204" pitchFamily="34" charset="0"/>
+              <a:buChar char="•"/>
+            </a:pPr>
+            <a:endParaRPr lang="en-GB" dirty="0"/>
+          </a:p>
+          <a:p>
+            <a:r>
+              <a:rPr lang="en-GB" dirty="0"/>
+              <a:t>So instead of memorising data, the model:</a:t>
+            </a:r>
+          </a:p>
+          <a:p>
+            <a:r>
+              <a:rPr lang="en-GB" dirty="0"/>
+              <a:t>Learns more general patterns</a:t>
+            </a:r>
+          </a:p>
+          <a:p>
+            <a:endParaRPr lang="en-PK" dirty="0"/>
+          </a:p>
+          <a:p>
+            <a:endParaRPr lang="en-PK" dirty="0"/>
+          </a:p>
+          <a:p>
+            <a:r>
+              <a:rPr lang="en-GB" b="1" dirty="0"/>
+              <a:t>Your results </a:t>
+            </a:r>
+          </a:p>
+          <a:p>
+            <a:r>
+              <a:rPr lang="en-GB" b="1" dirty="0"/>
+              <a:t>Before (Overfitting slide)</a:t>
+            </a:r>
+          </a:p>
+          <a:p>
+            <a:pPr>
+              <a:buFont typeface="Arial" panose="020B0604020202020204" pitchFamily="34" charset="0"/>
+              <a:buChar char="•"/>
+            </a:pPr>
+            <a:r>
+              <a:rPr lang="en-GB" dirty="0"/>
+              <a:t>Train RMSE = </a:t>
+            </a:r>
+            <a:r>
+              <a:rPr lang="en-GB" b="1" dirty="0"/>
+              <a:t>1.83</a:t>
+            </a:r>
+            <a:r>
+              <a:rPr lang="en-GB" dirty="0"/>
+              <a:t> </a:t>
+            </a:r>
+          </a:p>
+          <a:p>
+            <a:pPr>
+              <a:buFont typeface="Arial" panose="020B0604020202020204" pitchFamily="34" charset="0"/>
+              <a:buChar char="•"/>
+            </a:pPr>
+            <a:r>
+              <a:rPr lang="en-GB" dirty="0"/>
+              <a:t>Test RMSE = </a:t>
+            </a:r>
+            <a:r>
+              <a:rPr lang="en-GB" b="1" dirty="0"/>
+              <a:t>4.84</a:t>
+            </a:r>
+            <a:r>
+              <a:rPr lang="en-GB" dirty="0"/>
+              <a:t> </a:t>
+            </a:r>
+          </a:p>
+          <a:p>
+            <a:r>
+              <a:rPr lang="en-PK" dirty="0"/>
+              <a:t>👉 </a:t>
+            </a:r>
+            <a:r>
+              <a:rPr lang="en-GB" dirty="0"/>
+              <a:t>Big gap → overfitting</a:t>
+            </a:r>
+          </a:p>
+          <a:p>
+            <a:r>
+              <a:rPr lang="en-GB" b="1" dirty="0"/>
+              <a:t>After Regularisation</a:t>
+            </a:r>
+          </a:p>
+          <a:p>
+            <a:pPr>
+              <a:buFont typeface="Arial" panose="020B0604020202020204" pitchFamily="34" charset="0"/>
+              <a:buChar char="•"/>
+            </a:pPr>
+            <a:r>
+              <a:rPr lang="en-GB" dirty="0"/>
+              <a:t>Train RMSE = </a:t>
+            </a:r>
+            <a:r>
+              <a:rPr lang="en-GB" b="1" dirty="0"/>
+              <a:t>3.98</a:t>
+            </a:r>
+            <a:r>
+              <a:rPr lang="en-GB" dirty="0"/>
+              <a:t> </a:t>
+            </a:r>
+          </a:p>
+          <a:p>
+            <a:pPr>
+              <a:buFont typeface="Arial" panose="020B0604020202020204" pitchFamily="34" charset="0"/>
+              <a:buChar char="•"/>
+            </a:pPr>
+            <a:r>
+              <a:rPr lang="en-GB" dirty="0"/>
+              <a:t>Test RMSE = </a:t>
+            </a:r>
+            <a:r>
+              <a:rPr lang="en-GB" b="1" dirty="0"/>
+              <a:t>4.85</a:t>
+            </a:r>
+            <a:endParaRPr lang="en-GB" dirty="0"/>
+          </a:p>
+          <a:p>
+            <a:endParaRPr lang="en-PK" dirty="0"/>
+          </a:p>
+        </p:txBody>
+      </p:sp>
+      <p:sp>
+        <p:nvSpPr>
+          <p:cNvPr id="4" name="Slide Number Placeholder 3"/>
+          <p:cNvSpPr>
+            <a:spLocks noGrp="1"/>
+          </p:cNvSpPr>
+          <p:nvPr>
+            <p:ph type="sldNum" sz="quarter" idx="5"/>
+          </p:nvPr>
+        </p:nvSpPr>
+        <p:spPr/>
+        <p:txBody>
+          <a:bodyPr/>
+          <a:lstStyle/>
+          <a:p>
+            <a:fld id="{A9A0EA98-5831-4853-B862-C702E6EB345C}" type="slidenum">
+              <a:rPr lang="en-US" smtClean="0"/>
+              <a:t>22</a:t>
+            </a:fld>
+            <a:endParaRPr lang="en-US"/>
+          </a:p>
+        </p:txBody>
+      </p:sp>
+    </p:spTree>
+    <p:extLst>
+      <p:ext uri="{BB962C8B-B14F-4D97-AF65-F5344CB8AC3E}">
+        <p14:creationId xmlns:p14="http://schemas.microsoft.com/office/powerpoint/2010/main" val="1396846287"/>
+      </p:ext>
+    </p:extLst>
+  </p:cSld>
+  <p:clrMapOvr>
+    <a:masterClrMapping/>
+  </p:clrMapOvr>
+</p:notes>
+</file>
+
+<file path=ppt/notesSlides/notesSlide9.xml><?xml version="1.0" encoding="utf-8"?>
+<p:notes xmlns:a="http://schemas.openxmlformats.org/drawingml/2006/main" xmlns:r="http://schemas.openxmlformats.org/officeDocument/2006/relationships" xmlns:p="http://schemas.openxmlformats.org/presentationml/2006/main">
+  <p:cSld>
+    <p:spTree>
+      <p:nvGrpSpPr>
+        <p:cNvPr id="1" name=""/>
+        <p:cNvGrpSpPr/>
+        <p:nvPr/>
+      </p:nvGrpSpPr>
+      <p:grpSpPr>
+        <a:xfrm>
+          <a:off x="0" y="0"/>
+          <a:ext cx="0" cy="0"/>
+          <a:chOff x="0" y="0"/>
+          <a:chExt cx="0" cy="0"/>
+        </a:xfrm>
+      </p:grpSpPr>
+      <p:sp>
+        <p:nvSpPr>
+          <p:cNvPr id="2" name="Slide Image Placeholder 1"/>
+          <p:cNvSpPr>
+            <a:spLocks noGrp="1" noRot="1" noChangeAspect="1"/>
+          </p:cNvSpPr>
+          <p:nvPr>
+            <p:ph type="sldImg"/>
+          </p:nvPr>
+        </p:nvSpPr>
+        <p:spPr>
+          <a:xfrm>
+            <a:off x="138113" y="766763"/>
+            <a:ext cx="6823075" cy="3838575"/>
+          </a:xfrm>
+        </p:spPr>
+      </p:sp>
+      <p:sp>
+        <p:nvSpPr>
+          <p:cNvPr id="3" name="Notes Placeholder 2"/>
+          <p:cNvSpPr>
+            <a:spLocks noGrp="1"/>
+          </p:cNvSpPr>
+          <p:nvPr>
+            <p:ph type="body" idx="1"/>
+          </p:nvPr>
+        </p:nvSpPr>
+        <p:spPr/>
+        <p:txBody>
+          <a:bodyPr/>
+          <a:lstStyle/>
+          <a:p>
+            <a:r>
+              <a:rPr lang="en-GB" dirty="0"/>
+              <a:t>The feature importance results show that the most influential factor in predicting crime is the previous crime count (lag1), indicating strong temporal dependency. The dominant crime type and location features also contribute significantly, reflecting spatial clustering and crime patterns. Other features such as month, year, and seasonal indicators have relatively low importance, suggesting they have a weaker direct impact on crime prediction.</a:t>
+            </a:r>
+          </a:p>
+          <a:p>
+            <a:endParaRPr lang="en-PK" dirty="0"/>
+          </a:p>
+        </p:txBody>
+      </p:sp>
+      <p:sp>
+        <p:nvSpPr>
+          <p:cNvPr id="4" name="Slide Number Placeholder 3"/>
+          <p:cNvSpPr>
+            <a:spLocks noGrp="1"/>
+          </p:cNvSpPr>
+          <p:nvPr>
+            <p:ph type="sldNum" sz="quarter" idx="5"/>
+          </p:nvPr>
+        </p:nvSpPr>
+        <p:spPr/>
+        <p:txBody>
+          <a:bodyPr/>
+          <a:lstStyle/>
+          <a:p>
+            <a:fld id="{A9A0EA98-5831-4853-B862-C702E6EB345C}" type="slidenum">
+              <a:rPr lang="en-US" smtClean="0"/>
+              <a:t>23</a:t>
+            </a:fld>
+            <a:endParaRPr lang="en-US"/>
+          </a:p>
+        </p:txBody>
+      </p:sp>
+    </p:spTree>
+    <p:extLst>
+      <p:ext uri="{BB962C8B-B14F-4D97-AF65-F5344CB8AC3E}">
+        <p14:creationId xmlns:p14="http://schemas.microsoft.com/office/powerpoint/2010/main" val="3476076382"/>
       </p:ext>
     </p:extLst>
   </p:cSld>
@@ -10999,7 +11933,7 @@
         <p:spPr>
           <a:xfrm>
             <a:off x="2730631" y="1874605"/>
-            <a:ext cx="6701603" cy="2117183"/>
+            <a:ext cx="6701603" cy="3779176"/>
           </a:xfrm>
           <a:prstGeom prst="rect">
             <a:avLst/>
@@ -11060,6 +11994,36 @@
             <a:r>
               <a:rPr lang="en-GB" dirty="0"/>
               <a:t>The goal is to predict crime for the next month and for a specific region.</a:t>
+            </a:r>
+          </a:p>
+          <a:p>
+            <a:pPr>
+              <a:lnSpc>
+                <a:spcPct val="150000"/>
+              </a:lnSpc>
+            </a:pPr>
+            <a:endParaRPr lang="en-GB" dirty="0"/>
+          </a:p>
+          <a:p>
+            <a:pPr>
+              <a:lnSpc>
+                <a:spcPct val="150000"/>
+              </a:lnSpc>
+            </a:pPr>
+            <a:r>
+              <a:rPr lang="en-GB" dirty="0"/>
+              <a:t>Why use these two model: </a:t>
+            </a:r>
+          </a:p>
+          <a:p>
+            <a:pPr>
+              <a:lnSpc>
+                <a:spcPct val="150000"/>
+              </a:lnSpc>
+            </a:pPr>
+            <a:r>
+              <a:rPr lang="en-GB" dirty="0"/>
+              <a:t>We are testing whether crime prediction is simple (linear) or complex (non-linear).</a:t>
             </a:r>
           </a:p>
         </p:txBody>
@@ -11354,7 +12318,15 @@
           <a:p>
             <a:r>
               <a:rPr lang="en-GB" sz="2400" dirty="0"/>
-              <a:t>Crime affects people’s safety and daily life. Police collect large amounts of crime data, but it is difficult to study it manually.</a:t>
+              <a:t>Crime affects people’s </a:t>
+            </a:r>
+            <a:r>
+              <a:rPr lang="en-GB" sz="2400" b="1" dirty="0"/>
+              <a:t>safety and daily life</a:t>
+            </a:r>
+            <a:r>
+              <a:rPr lang="en-GB" sz="2400" dirty="0"/>
+              <a:t>. Police collect large amounts of crime data, but it is difficult to study it manually.</a:t>
             </a:r>
           </a:p>
           <a:p>
@@ -11366,19 +12338,39 @@
           <a:p>
             <a:r>
               <a:rPr lang="en-GB" sz="2400" dirty="0"/>
-              <a:t>Finding patterns in crime data </a:t>
-            </a:r>
-          </a:p>
-          <a:p>
+              <a:t>Finding </a:t>
+            </a:r>
+            <a:r>
+              <a:rPr lang="en-GB" sz="2400" b="1" dirty="0"/>
+              <a:t>patterns</a:t>
+            </a:r>
             <a:r>
               <a:rPr lang="en-GB" sz="2400" dirty="0"/>
-              <a:t>Identifying high-risk areas </a:t>
+              <a:t> in crime data </a:t>
             </a:r>
           </a:p>
           <a:p>
             <a:r>
               <a:rPr lang="en-GB" sz="2400" dirty="0"/>
-              <a:t>Predicting future crime levels </a:t>
+              <a:t>Identifying </a:t>
+            </a:r>
+            <a:r>
+              <a:rPr lang="en-GB" sz="2400" b="1" dirty="0"/>
+              <a:t>high-risk areas </a:t>
+            </a:r>
+          </a:p>
+          <a:p>
+            <a:r>
+              <a:rPr lang="en-GB" sz="2400" dirty="0"/>
+              <a:t>Predicting </a:t>
+            </a:r>
+            <a:r>
+              <a:rPr lang="en-GB" sz="2400" b="1" dirty="0"/>
+              <a:t>future</a:t>
+            </a:r>
+            <a:r>
+              <a:rPr lang="en-GB" sz="2400" dirty="0"/>
+              <a:t> crime levels </a:t>
             </a:r>
           </a:p>
           <a:p>
@@ -11454,8 +12446,8 @@
         </p:nvSpPr>
         <p:spPr>
           <a:xfrm>
-            <a:off x="3754221" y="65932"/>
-            <a:ext cx="4683557" cy="784075"/>
+            <a:off x="3529137" y="65932"/>
+            <a:ext cx="4683557" cy="663371"/>
           </a:xfrm>
         </p:spPr>
         <p:txBody>
@@ -11546,7 +12538,7 @@
           <p:nvPr/>
         </p:nvPicPr>
         <p:blipFill>
-          <a:blip r:embed="rId2">
+          <a:blip r:embed="rId3">
             <a:extLst>
               <a:ext uri="{28A0092B-C50C-407E-A947-70E740481C1C}">
                 <a14:useLocalDpi xmlns:a14="http://schemas.microsoft.com/office/drawing/2010/main" val="0"/>
@@ -11680,7 +12672,7 @@
         <p:spPr>
           <a:xfrm>
             <a:off x="3561048" y="3129304"/>
-            <a:ext cx="6987655" cy="1701684"/>
+            <a:ext cx="6987655" cy="2117183"/>
           </a:xfrm>
           <a:prstGeom prst="rect">
             <a:avLst/>
@@ -11709,6 +12701,18 @@
               <a:rPr lang="en-GB" dirty="0"/>
               <a:t>Test RMSE: 4.84</a:t>
             </a:r>
+          </a:p>
+          <a:p>
+            <a:pPr>
+              <a:lnSpc>
+                <a:spcPct val="150000"/>
+              </a:lnSpc>
+            </a:pPr>
+            <a:r>
+              <a:rPr lang="en-GB" b="1" dirty="0"/>
+              <a:t>Big gap → overfitting</a:t>
+            </a:r>
+            <a:endParaRPr lang="en-GB" dirty="0"/>
           </a:p>
           <a:p>
             <a:pPr>
@@ -11911,7 +12915,7 @@
           <p:nvPr/>
         </p:nvPicPr>
         <p:blipFill>
-          <a:blip r:embed="rId2">
+          <a:blip r:embed="rId3">
             <a:extLst>
               <a:ext uri="{28A0092B-C50C-407E-A947-70E740481C1C}">
                 <a14:useLocalDpi xmlns:a14="http://schemas.microsoft.com/office/drawing/2010/main" val="0"/>
@@ -12117,7 +13121,7 @@
           <p:nvPr/>
         </p:nvPicPr>
         <p:blipFill>
-          <a:blip r:embed="rId2">
+          <a:blip r:embed="rId3">
             <a:extLst>
               <a:ext uri="{28A0092B-C50C-407E-A947-70E740481C1C}">
                 <a14:useLocalDpi xmlns:a14="http://schemas.microsoft.com/office/drawing/2010/main" val="0"/>
@@ -12269,7 +13273,7 @@
           <p:nvPr/>
         </p:nvPicPr>
         <p:blipFill>
-          <a:blip r:embed="rId2">
+          <a:blip r:embed="rId3">
             <a:extLst>
               <a:ext uri="{28A0092B-C50C-407E-A947-70E740481C1C}">
                 <a14:useLocalDpi xmlns:a14="http://schemas.microsoft.com/office/drawing/2010/main" val="0"/>
@@ -12316,7 +13320,7 @@
           <p:nvPr/>
         </p:nvPicPr>
         <p:blipFill>
-          <a:blip r:embed="rId3">
+          <a:blip r:embed="rId4">
             <a:extLst>
               <a:ext uri="{28A0092B-C50C-407E-A947-70E740481C1C}">
                 <a14:useLocalDpi xmlns:a14="http://schemas.microsoft.com/office/drawing/2010/main" val="0"/>
@@ -12383,6 +13387,42 @@
               <a:rPr lang="en-GB" dirty="0"/>
               <a:t>This figure shows SHAP analysis using two plots. The left plot shows how each feature affects individual predictions, while the right plot shows overall feature importance. It is clear that dominant crime type and past crime (lag1) have the highest impact on predictions, while location features have a smaller effect.</a:t>
             </a:r>
+          </a:p>
+        </p:txBody>
+      </p:sp>
+      <p:sp>
+        <p:nvSpPr>
+          <p:cNvPr id="2" name="TextBox 1">
+            <a:extLst>
+              <a:ext uri="{FF2B5EF4-FFF2-40B4-BE49-F238E27FC236}">
+                <a16:creationId xmlns:a16="http://schemas.microsoft.com/office/drawing/2014/main" id="{AA9B8006-A8FB-1855-DB80-DE17D4FA20D4}"/>
+              </a:ext>
+            </a:extLst>
+          </p:cNvPr>
+          <p:cNvSpPr txBox="1"/>
+          <p:nvPr/>
+        </p:nvSpPr>
+        <p:spPr>
+          <a:xfrm>
+            <a:off x="2882365" y="1447335"/>
+            <a:ext cx="7657866" cy="369332"/>
+          </a:xfrm>
+          <a:prstGeom prst="rect">
+            <a:avLst/>
+          </a:prstGeom>
+          <a:noFill/>
+        </p:spPr>
+        <p:txBody>
+          <a:bodyPr wrap="none" rtlCol="0">
+            <a:spAutoFit/>
+          </a:bodyPr>
+          <a:lstStyle/>
+          <a:p>
+            <a:r>
+              <a:rPr lang="en-GB" b="1" dirty="0"/>
+              <a:t>How exactly does each feature influence the model’s predictions?</a:t>
+            </a:r>
+            <a:endParaRPr lang="en-PK" b="1" dirty="0"/>
           </a:p>
         </p:txBody>
       </p:sp>
@@ -12440,7 +13480,7 @@
         </p:nvSpPr>
         <p:spPr>
           <a:xfrm>
-            <a:off x="1172453" y="282138"/>
+            <a:off x="-853295" y="282138"/>
             <a:ext cx="10331054" cy="870769"/>
           </a:xfrm>
         </p:spPr>
@@ -12538,7 +13578,7 @@
           <p:nvPr/>
         </p:nvPicPr>
         <p:blipFill>
-          <a:blip r:embed="rId2">
+          <a:blip r:embed="rId3">
             <a:extLst>
               <a:ext uri="{28A0092B-C50C-407E-A947-70E740481C1C}">
                 <a14:useLocalDpi xmlns:a14="http://schemas.microsoft.com/office/drawing/2010/main" val="0"/>
@@ -12570,6 +13610,42 @@
           </a:extLst>
         </p:spPr>
       </p:pic>
+      <p:sp>
+        <p:nvSpPr>
+          <p:cNvPr id="2" name="TextBox 1">
+            <a:extLst>
+              <a:ext uri="{FF2B5EF4-FFF2-40B4-BE49-F238E27FC236}">
+                <a16:creationId xmlns:a16="http://schemas.microsoft.com/office/drawing/2014/main" id="{B239EDD9-BAC9-FB16-6AFB-9CF1BD94BA9D}"/>
+              </a:ext>
+            </a:extLst>
+          </p:cNvPr>
+          <p:cNvSpPr txBox="1"/>
+          <p:nvPr/>
+        </p:nvSpPr>
+        <p:spPr>
+          <a:xfrm>
+            <a:off x="6349609" y="260186"/>
+            <a:ext cx="3722859" cy="646331"/>
+          </a:xfrm>
+          <a:prstGeom prst="rect">
+            <a:avLst/>
+          </a:prstGeom>
+          <a:noFill/>
+        </p:spPr>
+        <p:txBody>
+          <a:bodyPr wrap="square" rtlCol="0">
+            <a:spAutoFit/>
+          </a:bodyPr>
+          <a:lstStyle/>
+          <a:p>
+            <a:r>
+              <a:rPr lang="en-GB" dirty="0"/>
+              <a:t>Are the model errors reasonable and well-behaved?</a:t>
+            </a:r>
+            <a:endParaRPr lang="en-PK" dirty="0"/>
+          </a:p>
+        </p:txBody>
+      </p:sp>
     </p:spTree>
     <p:extLst>
       <p:ext uri="{BB962C8B-B14F-4D97-AF65-F5344CB8AC3E}">
@@ -14179,8 +15255,12 @@
           <a:lstStyle/>
           <a:p>
             <a:r>
-              <a:rPr lang="en-GB" dirty="0"/>
-              <a:t>Source: UK Police Open Data </a:t>
+              <a:rPr lang="en-GB" b="1" dirty="0"/>
+              <a:t>Licensed and Open Source</a:t>
+            </a:r>
+            <a:r>
+              <a:rPr lang="en-GB" dirty="0"/>
+              <a:t>: UK Police Open Data </a:t>
             </a:r>
           </a:p>
           <a:p>

--- a/data/Presentation Document ppt.pptx
+++ b/data/Presentation Document ppt.pptx
@@ -2654,7 +2654,7 @@
           <a:p>
             <a:fld id="{3D6AE9DE-14C1-42EC-89CF-CB898A150C53}" type="datetime1">
               <a:rPr lang="en-US" smtClean="0"/>
-              <a:t>4/16/26</a:t>
+              <a:t>4/25/26</a:t>
             </a:fld>
             <a:endParaRPr lang="en-US"/>
           </a:p>
@@ -2997,7 +2997,7 @@
           <a:p>
             <a:fld id="{D81304C3-B8E3-446C-91D8-4B24F523B1EE}" type="datetime1">
               <a:rPr lang="en-US" smtClean="0"/>
-              <a:t>4/16/26</a:t>
+              <a:t>4/25/26</a:t>
             </a:fld>
             <a:endParaRPr lang="en-US"/>
           </a:p>
@@ -3392,7 +3392,7 @@
           <a:p>
             <a:fld id="{1C0554CE-59EF-4699-AE39-6FFD206A32FA}" type="datetime1">
               <a:rPr lang="en-US" smtClean="0"/>
-              <a:t>4/16/26</a:t>
+              <a:t>4/25/26</a:t>
             </a:fld>
             <a:endParaRPr lang="en-US"/>
           </a:p>
@@ -3726,7 +3726,7 @@
           <a:p>
             <a:fld id="{6952E827-2AB2-427E-8828-A42F60B2588F}" type="datetime1">
               <a:rPr lang="en-US" smtClean="0"/>
-              <a:t>4/16/26</a:t>
+              <a:t>4/25/26</a:t>
             </a:fld>
             <a:endParaRPr lang="en-US"/>
           </a:p>
@@ -4040,7 +4040,7 @@
           <a:p>
             <a:fld id="{34BA49D2-3DB7-4226-A7DB-AFD9BAA55DEF}" type="datetime1">
               <a:rPr lang="en-US" smtClean="0"/>
-              <a:t>4/16/26</a:t>
+              <a:t>4/25/26</a:t>
             </a:fld>
             <a:endParaRPr lang="en-US"/>
           </a:p>
@@ -4430,7 +4430,7 @@
           <a:p>
             <a:fld id="{F6F66DF9-0589-431D-8672-DC90B910BD17}" type="datetime1">
               <a:rPr lang="en-US" smtClean="0"/>
-              <a:t>4/16/26</a:t>
+              <a:t>4/25/26</a:t>
             </a:fld>
             <a:endParaRPr lang="en-US"/>
           </a:p>
@@ -4685,7 +4685,7 @@
           <a:p>
             <a:fld id="{3A818E7B-2E1C-43C3-A6DD-DC057E6BA6F1}" type="datetime1">
               <a:rPr lang="en-US" smtClean="0"/>
-              <a:t>4/16/26</a:t>
+              <a:t>4/25/26</a:t>
             </a:fld>
             <a:endParaRPr lang="en-US"/>
           </a:p>
@@ -4945,7 +4945,7 @@
           <a:p>
             <a:fld id="{60510C91-D168-484E-8A33-FD7F08A96286}" type="datetime1">
               <a:rPr lang="en-US" smtClean="0"/>
-              <a:t>4/16/26</a:t>
+              <a:t>4/25/26</a:t>
             </a:fld>
             <a:endParaRPr lang="en-US"/>
           </a:p>
@@ -5205,7 +5205,7 @@
           <a:p>
             <a:fld id="{57AE3903-2F96-43E5-B3FD-F3D7F89C074D}" type="datetime1">
               <a:rPr lang="en-US" smtClean="0"/>
-              <a:t>4/16/26</a:t>
+              <a:t>4/25/26</a:t>
             </a:fld>
             <a:endParaRPr lang="en-US"/>
           </a:p>
@@ -5539,7 +5539,7 @@
           <a:p>
             <a:fld id="{C02B9BB9-46B6-4775-AE31-DA327B45056F}" type="datetime1">
               <a:rPr lang="en-US" smtClean="0"/>
-              <a:t>4/16/26</a:t>
+              <a:t>4/25/26</a:t>
             </a:fld>
             <a:endParaRPr lang="en-US"/>
           </a:p>
@@ -5860,7 +5860,7 @@
           <a:p>
             <a:fld id="{50CA13ED-6BF8-4D10-B877-346C758DCD3A}" type="datetime1">
               <a:rPr lang="en-US" smtClean="0"/>
-              <a:t>4/16/26</a:t>
+              <a:t>4/25/26</a:t>
             </a:fld>
             <a:endParaRPr lang="en-US"/>
           </a:p>
@@ -6315,7 +6315,7 @@
           <a:p>
             <a:fld id="{D9817360-F361-4993-BBE6-4A9D23B8696F}" type="datetime1">
               <a:rPr lang="en-US" smtClean="0"/>
-              <a:t>4/16/26</a:t>
+              <a:t>4/25/26</a:t>
             </a:fld>
             <a:endParaRPr lang="en-US"/>
           </a:p>
@@ -6518,7 +6518,7 @@
           <a:p>
             <a:fld id="{868EECFF-6E5F-4144-B1A7-5F715C8B017C}" type="datetime1">
               <a:rPr lang="en-US" smtClean="0"/>
-              <a:t>4/16/26</a:t>
+              <a:t>4/25/26</a:t>
             </a:fld>
             <a:endParaRPr lang="en-US"/>
           </a:p>
@@ -6693,7 +6693,7 @@
           <a:p>
             <a:fld id="{94E2C67B-2D48-4378-BE5B-AFE93FBEE3F7}" type="datetime1">
               <a:rPr lang="en-US" smtClean="0"/>
-              <a:t>4/16/26</a:t>
+              <a:t>4/25/26</a:t>
             </a:fld>
             <a:endParaRPr lang="en-US"/>
           </a:p>
@@ -7024,7 +7024,7 @@
           <a:p>
             <a:fld id="{73DCF2FD-A8F1-4D60-90F2-0DDC7378D159}" type="datetime1">
               <a:rPr lang="en-US" smtClean="0"/>
-              <a:t>4/16/26</a:t>
+              <a:t>4/25/26</a:t>
             </a:fld>
             <a:endParaRPr lang="en-US"/>
           </a:p>
@@ -7367,7 +7367,7 @@
           <a:p>
             <a:fld id="{08167FE4-9878-4871-AC11-DACD246D7D40}" type="datetime1">
               <a:rPr lang="en-US" smtClean="0"/>
-              <a:t>4/16/26</a:t>
+              <a:t>4/25/26</a:t>
             </a:fld>
             <a:endParaRPr lang="en-US"/>
           </a:p>
@@ -9657,7 +9657,7 @@
           <a:p>
             <a:fld id="{D83D06A4-B070-4BFD-AF55-2779036C349E}" type="datetime1">
               <a:rPr lang="en-US" smtClean="0"/>
-              <a:t>4/16/26</a:t>
+              <a:t>4/25/26</a:t>
             </a:fld>
             <a:endParaRPr lang="en-US"/>
           </a:p>
